--- a/outputs/manual-20260523-cloudwalk-cost/presentations/cloudwalk-fidc-cost/output/cloudwalk-fidc-custo-financeiro-2025.pptx
+++ b/outputs/manual-20260523-cloudwalk-cost/presentations/cloudwalk-fidc-cost/output/cloudwalk-fidc-custo-financeiro-2025.pptx
@@ -15342,7 +15342,7 @@
                           </a:solidFill>
                           <a:latin typeface="Aptos"/>
                         </a:rPr>
-                        <a:t>CDI+ por série/cota; Big Picture I-IV via input manual</a:t>
+                        <a:t>CDI+ por série/cota; premissa sem validação documental</a:t>
                       </a:r>
                     </a:p>
                   </a:txBody>
